--- a/presentations/Team_E_Labs_1_to_9.pptx
+++ b/presentations/Team_E_Labs_1_to_9.pptx
@@ -2652,7 +2652,7 @@
           <a:p>
             <a:r>
               <a:rPr lang="en-US" dirty="0"/>
-              <a:t>Unit 7: stale data presented as live is a quiet lie, and a hand-typed freshness label rots. Ours is computed from max(refreshed_at) every time the page is built.</a:t>
+              <a:t>Unit 7: stale data presented as live is a quiet lie, and a hand-typed freshness label rots. Ours is computed from max(refreshed_at) on every run of the app. Worth mentioning if asked: the first version cached its snapshot on a parameter named _mtime, and Streamlit reads a leading underscore as do not hash this, so the cache never invalidated. It looked right until the pipeline ran and the banner refused to move.</a:t>
             </a:r>
             <a:endParaRPr lang="en-US" dirty="0"/>
           </a:p>
@@ -21839,7 +21839,7 @@
                 <a:ea typeface="Calibri" pitchFamily="34" charset="-122"/>
                 <a:cs typeface="Calibri" pitchFamily="34" charset="-120"/>
               </a:rPr>
-              <a:t>metrics.md defines formula, grain, filters and owner for every column. The dashboard computes nothing of its own</a:t>
+              <a:t>metrics.md defines formula, grain, filters and owner for every column. The Streamlit app in app.py computes nothing of its own</a:t>
             </a:r>
             <a:endParaRPr lang="en-US" sz="1250" dirty="0"/>
           </a:p>
@@ -22207,7 +22207,7 @@
                 <a:ea typeface="Calibri" pitchFamily="34" charset="-122"/>
                 <a:cs typeface="Calibri" pitchFamily="34" charset="-120"/>
               </a:rPr>
-              <a:t>We pushed the last successful refresh back nine days in the warehouse, which is what a pipeline that quietly stopped would leave behind, then rebuilt the page with no override of any kind. The banner changed from a reassurance to an instruction.</a:t>
+              <a:t>We pushed the last successful refresh back nine days in the warehouse, which is what a pipeline that quietly stopped would leave behind, then reloaded the Streamlit app with no override of any kind. The banner changed from a reassurance to an instruction.</a:t>
             </a:r>
             <a:endParaRPr lang="en-US" sz="1400" dirty="0"/>
           </a:p>
@@ -22248,8 +22248,8 @@
         </p:nvSpPr>
         <p:spPr>
           <a:xfrm>
-            <a:off x="886968" y="4864608"/>
-            <a:ext cx="10387584" cy="640080"/>
+            <a:off x="886968" y="4828032"/>
+            <a:ext cx="10387584" cy="777240"/>
           </a:xfrm>
           <a:prstGeom prst="rect">
             <a:avLst/>
@@ -22268,7 +22268,7 @@
               <a:buNone/>
             </a:pPr>
             <a:r>
-              <a:rPr lang="en-US" sz="1350" dirty="0">
+              <a:rPr lang="en-US" sz="1300" dirty="0">
                 <a:solidFill>
                   <a:srgbClr val="24303A"/>
                 </a:solidFill>
@@ -22276,9 +22276,9 @@
                 <a:ea typeface="Calibri" pitchFamily="34" charset="-122"/>
                 <a:cs typeface="Calibri" pitchFamily="34" charset="-120"/>
               </a:rPr>
-              <a:t>The recovery is the half worth noticing. Running the pipeline again cleared the banner without anyone editing the page. The label is not a warning someone remembered to switch on.</a:t>
-            </a:r>
-            <a:endParaRPr lang="en-US" sz="1350" dirty="0"/>
+              <a:t>The recovery is the half worth noticing. Running the pipeline cleared the banner on the next interaction, with no restart and nothing edited. That only works because the app never holds a DuckDB lock: it reads a snapshot, so the pipeline it reports on is never blocked by it.</a:t>
+            </a:r>
+            <a:endParaRPr lang="en-US" sz="1300" dirty="0"/>
           </a:p>
         </p:txBody>
       </p:sp>
@@ -28765,7 +28765,7 @@
                 <a:ea typeface="Consolas" pitchFamily="34" charset="-122"/>
                 <a:cs typeface="Consolas" pitchFamily="34" charset="-120"/>
               </a:rPr>
-              <a:t>metrics.md</a:t>
+              <a:t>app.py</a:t>
             </a:r>
             <a:endParaRPr lang="en-US" sz="680" dirty="0"/>
           </a:p>
@@ -28807,7 +28807,7 @@
                 <a:ea typeface="Calibri" pitchFamily="34" charset="-122"/>
                 <a:cs typeface="Calibri" pitchFamily="34" charset="-120"/>
               </a:rPr>
-              <a:t>One tap, every metric</a:t>
+              <a:t>One tap, one Streamlit</a:t>
             </a:r>
             <a:endParaRPr lang="en-US" sz="750" dirty="0"/>
           </a:p>
@@ -28827,7 +28827,7 @@
                 <a:ea typeface="Calibri" pitchFamily="34" charset="-122"/>
                 <a:cs typeface="Calibri" pitchFamily="34" charset="-120"/>
               </a:rPr>
-              <a:t>defined exactly once</a:t>
+              <a:t>view, metrics defined once</a:t>
             </a:r>
             <a:endParaRPr lang="en-US" sz="750" dirty="0"/>
           </a:p>
